--- a/presentations/07-asm-graphics-game/07-asm-graphics-game-lab.pptx
+++ b/presentations/07-asm-graphics-game/07-asm-graphics-game-lab.pptx
@@ -134,7 +134,7 @@
   <p:extLst>
     <p:ext uri="{521415D9-36F7-43E2-AB2F-B90AF26B5E84}">
       <p14:sectionLst xmlns:p14="http://schemas.microsoft.com/office/powerpoint/2010/main">
-        <p14:section name="Opening" id="{9aaeef15-2d7f-5241-98f1-a3c7b7e14f0a}">
+        <p14:section name="Opening" id="{36b05ce2-92fe-dd3a-9477-f801b4a0622b}">
           <p14:sldIdLst>
             <p14:sldId id="256"/>
             <p14:sldId id="257"/>
@@ -142,7 +142,7 @@
             <p14:sldId id="259"/>
           </p14:sldIdLst>
         </p14:section>
-        <p14:section name="Frame and paddle" id="{00accdc4-802f-b017-eab3-be5819bc58f4}">
+        <p14:section name="Frame and paddle" id="{d1f82765-f616-3555-0eb3-74ee7272f44d}">
           <p14:sldIdLst>
             <p14:sldId id="260"/>
             <p14:sldId id="261"/>
@@ -151,14 +151,14 @@
             <p14:sldId id="264"/>
           </p14:sldIdLst>
         </p14:section>
-        <p14:section name="Moving paddle" id="{ec6d1596-757a-e10a-1eb8-6548fbd0327e}">
+        <p14:section name="Moving paddle" id="{ceba6d0a-48f5-b6a5-ab6b-2915946b0b8a}">
           <p14:sldIdLst>
             <p14:sldId id="265"/>
             <p14:sldId id="266"/>
             <p14:sldId id="267"/>
           </p14:sldIdLst>
         </p14:section>
-        <p14:section name="Ball" id="{34d3b653-3b49-aec5-c632-c2f380975834}">
+        <p14:section name="Ball" id="{c607780e-0343-09e6-ab70-a4ce396bb8ab}">
           <p14:sldIdLst>
             <p14:sldId id="268"/>
             <p14:sldId id="269"/>
@@ -167,7 +167,7 @@
             <p14:sldId id="272"/>
           </p14:sldIdLst>
         </p14:section>
-        <p14:section name="Collision" id="{a6826cff-a544-e2ad-baaa-2e2780401a13}">
+        <p14:section name="Collision" id="{f28d77b3-a212-eb7c-3b8f-3c430e6c98fd}">
           <p14:sldIdLst>
             <p14:sldId id="273"/>
             <p14:sldId id="274"/>
@@ -177,7 +177,7 @@
             <p14:sldId id="278"/>
           </p14:sldIdLst>
         </p14:section>
-        <p14:section name="Tune" id="{70a1e4df-deb8-bee3-8558-58bf8a262762}">
+        <p14:section name="Tune" id="{a9a0dc34-715f-c73e-8071-82493faf0c0f}">
           <p14:sldIdLst>
             <p14:sldId id="279"/>
             <p14:sldId id="280"/>
@@ -185,7 +185,7 @@
             <p14:sldId id="282"/>
           </p14:sldIdLst>
         </p14:section>
-        <p14:section name="Closing" id="{2ecaf6a3-f9cd-8755-92ad-cca2b79cec10}">
+        <p14:section name="Closing" id="{771757c6-e08f-f04c-c6d8-bc6b7a8088e2}">
           <p14:sldIdLst>
             <p14:sldId id="283"/>
           </p14:sldIdLst>
@@ -8460,7 +8460,7 @@
               <a:buNone/>
             </a:pPr>
             <a:r>
-              <a:rPr lang="en-US" sz="1150" dirty="0">
+              <a:rPr lang="en-US" sz="1250" dirty="0">
                 <a:solidFill>
                   <a:srgbClr val="E6EDF2"/>
                 </a:solidFill>
@@ -8474,7 +8474,7 @@
               <a:buNone/>
             </a:pPr>
             <a:r>
-              <a:rPr lang="en-US" sz="1150" dirty="0">
+              <a:rPr lang="en-US" sz="1250" dirty="0">
                 <a:solidFill>
                   <a:srgbClr val="8FB3A0"/>
                 </a:solidFill>
@@ -8484,14 +8484,14 @@
               </a:rPr>
               <a:t># --- paddle collision</a:t>
             </a:r>
-            <a:endParaRPr lang="en-US" sz="1150" dirty="0"/>
-          </a:p>
-          <a:p>
-            <a:pPr indent="0" marL="0">
-              <a:buNone/>
-            </a:pPr>
-            <a:r>
-              <a:rPr lang="en-US" sz="1150" dirty="0">
+            <a:endParaRPr lang="en-US" sz="1250" dirty="0"/>
+          </a:p>
+          <a:p>
+            <a:pPr indent="0" marL="0">
+              <a:buNone/>
+            </a:pPr>
+            <a:r>
+              <a:rPr lang="en-US" sz="1250" dirty="0">
                 <a:solidFill>
                   <a:srgbClr val="E6EDF2"/>
                 </a:solidFill>
@@ -8501,14 +8501,14 @@
               </a:rPr>
               <a:t>    la   t0, ball_x</a:t>
             </a:r>
-            <a:endParaRPr lang="en-US" sz="1150" dirty="0"/>
-          </a:p>
-          <a:p>
-            <a:pPr indent="0" marL="0">
-              <a:buNone/>
-            </a:pPr>
-            <a:r>
-              <a:rPr lang="en-US" sz="1150" dirty="0">
+            <a:endParaRPr lang="en-US" sz="1250" dirty="0"/>
+          </a:p>
+          <a:p>
+            <a:pPr indent="0" marL="0">
+              <a:buNone/>
+            </a:pPr>
+            <a:r>
+              <a:rPr lang="en-US" sz="1250" dirty="0">
                 <a:solidFill>
                   <a:srgbClr val="E6EDF2"/>
                 </a:solidFill>
@@ -8522,7 +8522,7 @@
               <a:buNone/>
             </a:pPr>
             <a:r>
-              <a:rPr lang="en-US" sz="1150" dirty="0">
+              <a:rPr lang="en-US" sz="1250" dirty="0">
                 <a:solidFill>
                   <a:srgbClr val="8FB3A0"/>
                 </a:solidFill>
@@ -8532,14 +8532,14 @@
               </a:rPr>
               <a:t># a0..a3: the ball rectangle</a:t>
             </a:r>
-            <a:endParaRPr lang="en-US" sz="1150" dirty="0"/>
-          </a:p>
-          <a:p>
-            <a:pPr indent="0" marL="0">
-              <a:buNone/>
-            </a:pPr>
-            <a:r>
-              <a:rPr lang="en-US" sz="1150" dirty="0">
+            <a:endParaRPr lang="en-US" sz="1250" dirty="0"/>
+          </a:p>
+          <a:p>
+            <a:pPr indent="0" marL="0">
+              <a:buNone/>
+            </a:pPr>
+            <a:r>
+              <a:rPr lang="en-US" sz="1250" dirty="0">
                 <a:solidFill>
                   <a:srgbClr val="E6EDF2"/>
                 </a:solidFill>
@@ -8549,14 +8549,14 @@
               </a:rPr>
               <a:t>    la   t0, ball_y</a:t>
             </a:r>
-            <a:endParaRPr lang="en-US" sz="1150" dirty="0"/>
-          </a:p>
-          <a:p>
-            <a:pPr indent="0" marL="0">
-              <a:buNone/>
-            </a:pPr>
-            <a:r>
-              <a:rPr lang="en-US" sz="1150" dirty="0">
+            <a:endParaRPr lang="en-US" sz="1250" dirty="0"/>
+          </a:p>
+          <a:p>
+            <a:pPr indent="0" marL="0">
+              <a:buNone/>
+            </a:pPr>
+            <a:r>
+              <a:rPr lang="en-US" sz="1250" dirty="0">
                 <a:solidFill>
                   <a:srgbClr val="E6EDF2"/>
                 </a:solidFill>
@@ -8566,14 +8566,14 @@
               </a:rPr>
               <a:t>    lw   a1, 0(t0)</a:t>
             </a:r>
-            <a:endParaRPr lang="en-US" sz="1150" dirty="0"/>
-          </a:p>
-          <a:p>
-            <a:pPr indent="0" marL="0">
-              <a:buNone/>
-            </a:pPr>
-            <a:r>
-              <a:rPr lang="en-US" sz="1150" dirty="0">
+            <a:endParaRPr lang="en-US" sz="1250" dirty="0"/>
+          </a:p>
+          <a:p>
+            <a:pPr indent="0" marL="0">
+              <a:buNone/>
+            </a:pPr>
+            <a:r>
+              <a:rPr lang="en-US" sz="1250" dirty="0">
                 <a:solidFill>
                   <a:srgbClr val="E6EDF2"/>
                 </a:solidFill>
@@ -8583,14 +8583,14 @@
               </a:rPr>
               <a:t>    li   a2, BALL_SIZE</a:t>
             </a:r>
-            <a:endParaRPr lang="en-US" sz="1150" dirty="0"/>
-          </a:p>
-          <a:p>
-            <a:pPr indent="0" marL="0">
-              <a:buNone/>
-            </a:pPr>
-            <a:r>
-              <a:rPr lang="en-US" sz="1150" dirty="0">
+            <a:endParaRPr lang="en-US" sz="1250" dirty="0"/>
+          </a:p>
+          <a:p>
+            <a:pPr indent="0" marL="0">
+              <a:buNone/>
+            </a:pPr>
+            <a:r>
+              <a:rPr lang="en-US" sz="1250" dirty="0">
                 <a:solidFill>
                   <a:srgbClr val="E6EDF2"/>
                 </a:solidFill>
@@ -8600,14 +8600,14 @@
               </a:rPr>
               <a:t>    li   a3, BALL_SIZE</a:t>
             </a:r>
-            <a:endParaRPr lang="en-US" sz="1150" dirty="0"/>
-          </a:p>
-          <a:p>
-            <a:pPr indent="0" marL="0">
-              <a:buNone/>
-            </a:pPr>
-            <a:r>
-              <a:rPr lang="en-US" sz="1150" dirty="0">
+            <a:endParaRPr lang="en-US" sz="1250" dirty="0"/>
+          </a:p>
+          <a:p>
+            <a:pPr indent="0" marL="0">
+              <a:buNone/>
+            </a:pPr>
+            <a:r>
+              <a:rPr lang="en-US" sz="1250" dirty="0">
                 <a:solidFill>
                   <a:srgbClr val="E6EDF2"/>
                 </a:solidFill>
@@ -8617,14 +8617,14 @@
               </a:rPr>
               <a:t>    la   t0, paddle_x</a:t>
             </a:r>
-            <a:endParaRPr lang="en-US" sz="1150" dirty="0"/>
-          </a:p>
-          <a:p>
-            <a:pPr indent="0" marL="0">
-              <a:buNone/>
-            </a:pPr>
-            <a:r>
-              <a:rPr lang="en-US" sz="1150" dirty="0">
+            <a:endParaRPr lang="en-US" sz="1250" dirty="0"/>
+          </a:p>
+          <a:p>
+            <a:pPr indent="0" marL="0">
+              <a:buNone/>
+            </a:pPr>
+            <a:r>
+              <a:rPr lang="en-US" sz="1250" dirty="0">
                 <a:solidFill>
                   <a:srgbClr val="E6EDF2"/>
                 </a:solidFill>
@@ -8638,7 +8638,7 @@
               <a:buNone/>
             </a:pPr>
             <a:r>
-              <a:rPr lang="en-US" sz="1150" dirty="0">
+              <a:rPr lang="en-US" sz="1250" dirty="0">
                 <a:solidFill>
                   <a:srgbClr val="8FB3A0"/>
                 </a:solidFill>
@@ -8648,14 +8648,14 @@
               </a:rPr>
               <a:t># a4..a7: the paddle rectangle</a:t>
             </a:r>
-            <a:endParaRPr lang="en-US" sz="1150" dirty="0"/>
-          </a:p>
-          <a:p>
-            <a:pPr indent="0" marL="0">
-              <a:buNone/>
-            </a:pPr>
-            <a:r>
-              <a:rPr lang="en-US" sz="1150" dirty="0">
+            <a:endParaRPr lang="en-US" sz="1250" dirty="0"/>
+          </a:p>
+          <a:p>
+            <a:pPr indent="0" marL="0">
+              <a:buNone/>
+            </a:pPr>
+            <a:r>
+              <a:rPr lang="en-US" sz="1250" dirty="0">
                 <a:solidFill>
                   <a:srgbClr val="E6EDF2"/>
                 </a:solidFill>
@@ -8665,14 +8665,14 @@
               </a:rPr>
               <a:t>    li   a5, PADDLE_Y</a:t>
             </a:r>
-            <a:endParaRPr lang="en-US" sz="1150" dirty="0"/>
-          </a:p>
-          <a:p>
-            <a:pPr indent="0" marL="0">
-              <a:buNone/>
-            </a:pPr>
-            <a:r>
-              <a:rPr lang="en-US" sz="1150" dirty="0">
+            <a:endParaRPr lang="en-US" sz="1250" dirty="0"/>
+          </a:p>
+          <a:p>
+            <a:pPr indent="0" marL="0">
+              <a:buNone/>
+            </a:pPr>
+            <a:r>
+              <a:rPr lang="en-US" sz="1250" dirty="0">
                 <a:solidFill>
                   <a:srgbClr val="E6EDF2"/>
                 </a:solidFill>
@@ -8682,14 +8682,14 @@
               </a:rPr>
               <a:t>    li   a6, PADDLE_W</a:t>
             </a:r>
-            <a:endParaRPr lang="en-US" sz="1150" dirty="0"/>
-          </a:p>
-          <a:p>
-            <a:pPr indent="0" marL="0">
-              <a:buNone/>
-            </a:pPr>
-            <a:r>
-              <a:rPr lang="en-US" sz="1150" dirty="0">
+            <a:endParaRPr lang="en-US" sz="1250" dirty="0"/>
+          </a:p>
+          <a:p>
+            <a:pPr indent="0" marL="0">
+              <a:buNone/>
+            </a:pPr>
+            <a:r>
+              <a:rPr lang="en-US" sz="1250" dirty="0">
                 <a:solidFill>
                   <a:srgbClr val="E6EDF2"/>
                 </a:solidFill>
@@ -8699,14 +8699,14 @@
               </a:rPr>
               <a:t>    li   a7, PADDLE_H</a:t>
             </a:r>
-            <a:endParaRPr lang="en-US" sz="1150" dirty="0"/>
-          </a:p>
-          <a:p>
-            <a:pPr indent="0" marL="0">
-              <a:buNone/>
-            </a:pPr>
-            <a:r>
-              <a:rPr lang="en-US" sz="1150" dirty="0">
+            <a:endParaRPr lang="en-US" sz="1250" dirty="0"/>
+          </a:p>
+          <a:p>
+            <a:pPr indent="0" marL="0">
+              <a:buNone/>
+            </a:pPr>
+            <a:r>
+              <a:rPr lang="en-US" sz="1250" dirty="0">
                 <a:solidFill>
                   <a:srgbClr val="E6EDF2"/>
                 </a:solidFill>
@@ -8720,7 +8720,7 @@
               <a:buNone/>
             </a:pPr>
             <a:r>
-              <a:rPr lang="en-US" sz="1150" dirty="0">
+              <a:rPr lang="en-US" sz="1250" dirty="0">
                 <a:solidFill>
                   <a:srgbClr val="8FB3A0"/>
                 </a:solidFill>
@@ -8730,14 +8730,14 @@
               </a:rPr>
               <a:t># a0 = non-zero if they overlap</a:t>
             </a:r>
-            <a:endParaRPr lang="en-US" sz="1150" dirty="0"/>
-          </a:p>
-          <a:p>
-            <a:pPr indent="0" marL="0">
-              <a:buNone/>
-            </a:pPr>
-            <a:r>
-              <a:rPr lang="en-US" sz="1150" dirty="0">
+            <a:endParaRPr lang="en-US" sz="1250" dirty="0"/>
+          </a:p>
+          <a:p>
+            <a:pPr indent="0" marL="0">
+              <a:buNone/>
+            </a:pPr>
+            <a:r>
+              <a:rPr lang="en-US" sz="1250" dirty="0">
                 <a:solidFill>
                   <a:srgbClr val="E6EDF2"/>
                 </a:solidFill>
@@ -8747,14 +8747,14 @@
               </a:rPr>
               <a:t>    beqz a0, update_done</a:t>
             </a:r>
-            <a:endParaRPr lang="en-US" sz="1150" dirty="0"/>
-          </a:p>
-          <a:p>
-            <a:pPr indent="0" marL="0">
-              <a:buNone/>
-            </a:pPr>
-            <a:r>
-              <a:rPr lang="en-US" sz="1150" dirty="0">
+            <a:endParaRPr lang="en-US" sz="1250" dirty="0"/>
+          </a:p>
+          <a:p>
+            <a:pPr indent="0" marL="0">
+              <a:buNone/>
+            </a:pPr>
+            <a:r>
+              <a:rPr lang="en-US" sz="1250" dirty="0">
                 <a:solidFill>
                   <a:srgbClr val="E6EDF2"/>
                 </a:solidFill>
@@ -8764,14 +8764,14 @@
               </a:rPr>
               <a:t>    la   t0, ball_dy</a:t>
             </a:r>
-            <a:endParaRPr lang="en-US" sz="1150" dirty="0"/>
-          </a:p>
-          <a:p>
-            <a:pPr indent="0" marL="0">
-              <a:buNone/>
-            </a:pPr>
-            <a:r>
-              <a:rPr lang="en-US" sz="1150" dirty="0">
+            <a:endParaRPr lang="en-US" sz="1250" dirty="0"/>
+          </a:p>
+          <a:p>
+            <a:pPr indent="0" marL="0">
+              <a:buNone/>
+            </a:pPr>
+            <a:r>
+              <a:rPr lang="en-US" sz="1250" dirty="0">
                 <a:solidFill>
                   <a:srgbClr val="E6EDF2"/>
                 </a:solidFill>
@@ -8781,14 +8781,14 @@
               </a:rPr>
               <a:t>    lw   t1, 0(t0)</a:t>
             </a:r>
-            <a:endParaRPr lang="en-US" sz="1150" dirty="0"/>
-          </a:p>
-          <a:p>
-            <a:pPr indent="0" marL="0">
-              <a:buNone/>
-            </a:pPr>
-            <a:r>
-              <a:rPr lang="en-US" sz="1150" dirty="0">
+            <a:endParaRPr lang="en-US" sz="1250" dirty="0"/>
+          </a:p>
+          <a:p>
+            <a:pPr indent="0" marL="0">
+              <a:buNone/>
+            </a:pPr>
+            <a:r>
+              <a:rPr lang="en-US" sz="1250" dirty="0">
                 <a:solidFill>
                   <a:srgbClr val="E6EDF2"/>
                 </a:solidFill>
@@ -8802,7 +8802,7 @@
               <a:buNone/>
             </a:pPr>
             <a:r>
-              <a:rPr lang="en-US" sz="1150" dirty="0">
+              <a:rPr lang="en-US" sz="1250" dirty="0">
                 <a:solidFill>
                   <a:srgbClr val="8FB3A0"/>
                 </a:solidFill>
@@ -8810,16 +8810,16 @@
                 <a:ea typeface="Courier New" pitchFamily="34" charset="-122"/>
                 <a:cs typeface="Courier New" pitchFamily="34" charset="-120"/>
               </a:rPr>
-              <a:t># guard: bounce only while moving down</a:t>
-            </a:r>
-            <a:endParaRPr lang="en-US" sz="1150" dirty="0"/>
-          </a:p>
-          <a:p>
-            <a:pPr indent="0" marL="0">
-              <a:buNone/>
-            </a:pPr>
-            <a:r>
-              <a:rPr lang="en-US" sz="1150" dirty="0">
+              <a:t># guard: bounce only while moving</a:t>
+            </a:r>
+            <a:endParaRPr lang="en-US" sz="1250" dirty="0"/>
+          </a:p>
+          <a:p>
+            <a:pPr indent="0" marL="0">
+              <a:buNone/>
+            </a:pPr>
+            <a:r>
+              <a:rPr lang="en-US" sz="1250" dirty="0">
                 <a:solidFill>
                   <a:srgbClr val="E6EDF2"/>
                 </a:solidFill>
@@ -8827,16 +8827,16 @@
                 <a:ea typeface="Courier New" pitchFamily="34" charset="-122"/>
                 <a:cs typeface="Courier New" pitchFamily="34" charset="-120"/>
               </a:rPr>
-              <a:t>    neg  t1, t1</a:t>
-            </a:r>
-            <a:endParaRPr lang="en-US" sz="1150" dirty="0"/>
-          </a:p>
-          <a:p>
-            <a:pPr indent="0" marL="0">
-              <a:buNone/>
-            </a:pPr>
-            <a:r>
-              <a:rPr lang="en-US" sz="1150" dirty="0">
+              <a:t>        down</a:t>
+            </a:r>
+            <a:endParaRPr lang="en-US" sz="1250" dirty="0"/>
+          </a:p>
+          <a:p>
+            <a:pPr indent="0" marL="0">
+              <a:buNone/>
+            </a:pPr>
+            <a:r>
+              <a:rPr lang="en-US" sz="1250" dirty="0">
                 <a:solidFill>
                   <a:srgbClr val="E6EDF2"/>
                 </a:solidFill>
@@ -8844,9 +8844,26 @@
                 <a:ea typeface="Courier New" pitchFamily="34" charset="-122"/>
                 <a:cs typeface="Courier New" pitchFamily="34" charset="-120"/>
               </a:rPr>
+              <a:t>    neg  t1, t1</a:t>
+            </a:r>
+            <a:endParaRPr lang="en-US" sz="1250" dirty="0"/>
+          </a:p>
+          <a:p>
+            <a:pPr indent="0" marL="0">
+              <a:buNone/>
+            </a:pPr>
+            <a:r>
+              <a:rPr lang="en-US" sz="1250" dirty="0">
+                <a:solidFill>
+                  <a:srgbClr val="E6EDF2"/>
+                </a:solidFill>
+                <a:latin typeface="Courier New" pitchFamily="34" charset="0"/>
+                <a:ea typeface="Courier New" pitchFamily="34" charset="-122"/>
+                <a:cs typeface="Courier New" pitchFamily="34" charset="-120"/>
+              </a:rPr>
               <a:t>    sw   t1, 0(t0)</a:t>
             </a:r>
-            <a:endParaRPr lang="en-US" sz="1150" dirty="0"/>
+            <a:endParaRPr lang="en-US" sz="1250" dirty="0"/>
           </a:p>
         </p:txBody>
       </p:sp>
